--- a/dist/초1/수학/몇째와짝수홀수/초1_수학_몇째와짝수홀수_01_몇째인지알기_학생용.pptx
+++ b/dist/초1/수학/몇째와짝수홀수/초1_수학_몇째와짝수홀수_01_몇째인지알기_학생용.pptx
@@ -119,13 +119,13 @@
   <p:extLst>
     <p:ext uri="{521415D9-36F7-43E2-AB2F-B90AF26B5E84}">
       <p14:sectionLst xmlns:p14="http://schemas.microsoft.com/office/powerpoint/2010/main">
-        <p14:section name="도입" id="{67793c22-fdc9-712c-9a0c-1f9b8e8034f8}">
+        <p14:section name="도입" id="{ab39c505-1de4-44ce-e9cc-4852d30ffa7a}">
           <p14:sldIdLst>
             <p14:sldId id="256"/>
             <p14:sldId id="257"/>
           </p14:sldIdLst>
         </p14:section>
-        <p14:section name="개념" id="{db5e7d9f-daa6-8f04-ded1-c6ec5bfb668d}">
+        <p14:section name="개념" id="{bfef57f3-4c0d-82d0-f226-4bdeb78343c1}">
           <p14:sldIdLst>
             <p14:sldId id="258"/>
             <p14:sldId id="259"/>
@@ -133,25 +133,25 @@
             <p14:sldId id="261"/>
           </p14:sldIdLst>
         </p14:section>
-        <p14:section name="연습" id="{6b3c7f34-b0ee-c98d-105b-b7a80c391c7e}">
+        <p14:section name="연습" id="{02402ed3-99c9-b210-b5bb-0ecb57645b96}">
           <p14:sldIdLst>
             <p14:sldId id="262"/>
             <p14:sldId id="263"/>
             <p14:sldId id="264"/>
           </p14:sldIdLst>
         </p14:section>
-        <p14:section name="확인" id="{6c1cf764-5cda-80a2-373a-904011a2db43}">
+        <p14:section name="확인" id="{b44f3c29-0996-5d84-d794-bce43b3268e6}">
           <p14:sldIdLst>
             <p14:sldId id="265"/>
             <p14:sldId id="266"/>
           </p14:sldIdLst>
         </p14:section>
-        <p14:section name="정리" id="{4fb3a33f-df29-ad00-7a80-fbd0d74f6106}">
+        <p14:section name="정리" id="{f12b957e-4459-8034-eed6-f555db135eed}">
           <p14:sldIdLst>
             <p14:sldId id="267"/>
           </p14:sldIdLst>
         </p14:section>
-        <p14:section name="보충" id="{a487c215-e4ca-9868-c7ad-453808200a97}">
+        <p14:section name="보충" id="{dc6cbef7-b20c-3eb5-a1c4-5412ce2f74b7}">
           <p14:sldIdLst>
             <p14:sldId id="268"/>
           </p14:sldIdLst>

--- a/dist/초1/수학/몇째와짝수홀수/초1_수학_몇째와짝수홀수_01_몇째인지알기_학생용.pptx
+++ b/dist/초1/수학/몇째와짝수홀수/초1_수학_몇째와짝수홀수_01_몇째인지알기_학생용.pptx
@@ -119,13 +119,13 @@
   <p:extLst>
     <p:ext uri="{521415D9-36F7-43E2-AB2F-B90AF26B5E84}">
       <p14:sectionLst xmlns:p14="http://schemas.microsoft.com/office/powerpoint/2010/main">
-        <p14:section name="도입" id="{ab39c505-1de4-44ce-e9cc-4852d30ffa7a}">
+        <p14:section name="도입" id="{5462d563-b916-b8bf-031e-8d52418c90eb}">
           <p14:sldIdLst>
             <p14:sldId id="256"/>
             <p14:sldId id="257"/>
           </p14:sldIdLst>
         </p14:section>
-        <p14:section name="개념" id="{bfef57f3-4c0d-82d0-f226-4bdeb78343c1}">
+        <p14:section name="개념" id="{6b42b707-0027-83e2-6657-341e3da8ae19}">
           <p14:sldIdLst>
             <p14:sldId id="258"/>
             <p14:sldId id="259"/>
@@ -133,25 +133,25 @@
             <p14:sldId id="261"/>
           </p14:sldIdLst>
         </p14:section>
-        <p14:section name="연습" id="{02402ed3-99c9-b210-b5bb-0ecb57645b96}">
+        <p14:section name="연습" id="{7a6fa9af-d8bf-9187-57e4-d30b99884687}">
           <p14:sldIdLst>
             <p14:sldId id="262"/>
             <p14:sldId id="263"/>
             <p14:sldId id="264"/>
           </p14:sldIdLst>
         </p14:section>
-        <p14:section name="확인" id="{b44f3c29-0996-5d84-d794-bce43b3268e6}">
+        <p14:section name="확인" id="{3bc75b90-e9b2-3527-6468-47bcaf055321}">
           <p14:sldIdLst>
             <p14:sldId id="265"/>
             <p14:sldId id="266"/>
           </p14:sldIdLst>
         </p14:section>
-        <p14:section name="정리" id="{f12b957e-4459-8034-eed6-f555db135eed}">
+        <p14:section name="정리" id="{f32f279d-e5cd-6494-89be-c295cb1c87dd}">
           <p14:sldIdLst>
             <p14:sldId id="267"/>
           </p14:sldIdLst>
         </p14:section>
-        <p14:section name="보충" id="{dc6cbef7-b20c-3eb5-a1c4-5412ce2f74b7}">
+        <p14:section name="보충" id="{b216a932-106c-dfb5-a74a-e6f568ef77aa}">
           <p14:sldIdLst>
             <p14:sldId id="268"/>
           </p14:sldIdLst>

--- a/dist/초1/수학/몇째와짝수홀수/초1_수학_몇째와짝수홀수_01_몇째인지알기_학생용.pptx
+++ b/dist/초1/수학/몇째와짝수홀수/초1_수학_몇째와짝수홀수_01_몇째인지알기_학생용.pptx
@@ -119,13 +119,13 @@
   <p:extLst>
     <p:ext uri="{521415D9-36F7-43E2-AB2F-B90AF26B5E84}">
       <p14:sectionLst xmlns:p14="http://schemas.microsoft.com/office/powerpoint/2010/main">
-        <p14:section name="도입" id="{5462d563-b916-b8bf-031e-8d52418c90eb}">
+        <p14:section name="도입" id="{28068808-f4e3-77df-8fa2-c12bef7ed7e9}">
           <p14:sldIdLst>
             <p14:sldId id="256"/>
             <p14:sldId id="257"/>
           </p14:sldIdLst>
         </p14:section>
-        <p14:section name="개념" id="{6b42b707-0027-83e2-6657-341e3da8ae19}">
+        <p14:section name="개념" id="{1eee08e4-504f-ead8-cb43-8b9f321796c4}">
           <p14:sldIdLst>
             <p14:sldId id="258"/>
             <p14:sldId id="259"/>
@@ -133,25 +133,25 @@
             <p14:sldId id="261"/>
           </p14:sldIdLst>
         </p14:section>
-        <p14:section name="연습" id="{7a6fa9af-d8bf-9187-57e4-d30b99884687}">
+        <p14:section name="연습" id="{0dc5799f-214d-2160-d00f-c51f8480f364}">
           <p14:sldIdLst>
             <p14:sldId id="262"/>
             <p14:sldId id="263"/>
             <p14:sldId id="264"/>
           </p14:sldIdLst>
         </p14:section>
-        <p14:section name="확인" id="{3bc75b90-e9b2-3527-6468-47bcaf055321}">
+        <p14:section name="확인" id="{451b96e3-6a2e-66dc-7611-9b1e5f641598}">
           <p14:sldIdLst>
             <p14:sldId id="265"/>
             <p14:sldId id="266"/>
           </p14:sldIdLst>
         </p14:section>
-        <p14:section name="정리" id="{f32f279d-e5cd-6494-89be-c295cb1c87dd}">
+        <p14:section name="정리" id="{b05bf169-d71d-7254-0772-76858fe4ec1b}">
           <p14:sldIdLst>
             <p14:sldId id="267"/>
           </p14:sldIdLst>
         </p14:section>
-        <p14:section name="보충" id="{b216a932-106c-dfb5-a74a-e6f568ef77aa}">
+        <p14:section name="보충" id="{ddc8a67f-d9b0-a55d-3b81-2acd07912406}">
           <p14:sldIdLst>
             <p14:sldId id="268"/>
           </p14:sldIdLst>
